--- a/output/LINK. kennismaking Portrelo.pptx
+++ b/output/LINK. kennismaking Portrelo.pptx
@@ -2519,7 +2519,7 @@
                 <a:ea typeface="Arial" pitchFamily="34" charset="-122"/>
                 <a:cs typeface="Arial" pitchFamily="34" charset="-120"/>
               </a:rPr>
-              <a:t>Wat LINK. voor Portrelo kan betekenen: in de maanden voor de lancering ontdekken wie op dit product zit te wachten en wat de markt ervan vindt, zodat er in januari al afspraken staan.</a:t>
+              <a:t>Wat LINK. voor Portrelo kan betekenen: in de maanden voor de lancering aan tafel bij communicatieteams, zorginstellingen en gemeenten, zodat er in januari al demo's in de agenda staan.</a:t>
             </a:r>
             <a:endParaRPr lang="en-US" sz="1400" dirty="0"/>
           </a:p>
@@ -2626,7 +2626,7 @@
         <p:spPr>
           <a:xfrm>
             <a:off x="1854195" y="5714986"/>
-            <a:ext cx="1396997" cy="406399"/>
+            <a:ext cx="1534579" cy="406399"/>
           </a:xfrm>
           <a:prstGeom prst="roundRect">
             <a:avLst>
@@ -2639,45 +2639,30 @@
           <a:ln/>
         </p:spPr>
       </p:sp>
-      <p:sp>
-        <p:nvSpPr>
-          <p:cNvPr id="33" name="Text 31"/>
-          <p:cNvSpPr txBox="1"/>
-          <p:nvPr/>
-        </p:nvSpPr>
-        <p:spPr>
-          <a:xfrm>
-            <a:off x="1854195" y="5714986"/>
-            <a:ext cx="1396997" cy="406399"/>
-          </a:xfrm>
-          <a:prstGeom prst="rect">
-            <a:avLst/>
-          </a:prstGeom>
-          <a:noFill/>
-          <a:ln/>
-        </p:spPr>
-        <p:txBody>
-          <a:bodyPr wrap="square" lIns="0" tIns="0" rIns="0" bIns="0" rtlCol="0" anchor="ctr"/>
-          <a:lstStyle/>
-          <a:p>
-            <a:pPr algn="ctr" indent="0" marL="0">
-              <a:buNone/>
-            </a:pPr>
-            <a:r>
-              <a:rPr lang="en-US" sz="1500" b="1" dirty="0">
-                <a:solidFill>
-                  <a:srgbClr val="1C2230"/>
-                </a:solidFill>
-                <a:latin typeface="Arial" pitchFamily="34" charset="0"/>
-                <a:ea typeface="Arial" pitchFamily="34" charset="-122"/>
-                <a:cs typeface="Arial" pitchFamily="34" charset="-120"/>
-              </a:rPr>
-              <a:t>Portrelo</a:t>
-            </a:r>
-            <a:endParaRPr lang="en-US" sz="1500" dirty="0"/>
-          </a:p>
-        </p:txBody>
-      </p:sp>
+      <p:pic>
+        <p:nvPicPr>
+          <p:cNvPr id="33" name="Image 0" descr="preencoded.png">    </p:cNvPr>
+          <p:cNvPicPr>
+            <a:picLocks noChangeAspect="1"/>
+          </p:cNvPicPr>
+          <p:nvPr/>
+        </p:nvPicPr>
+        <p:blipFill>
+          <a:blip r:embed="rId1"/>
+          <a:stretch>
+            <a:fillRect/>
+          </a:stretch>
+        </p:blipFill>
+        <p:spPr>
+          <a:xfrm>
+            <a:off x="2031995" y="5791186"/>
+            <a:ext cx="1178980" cy="253999"/>
+          </a:xfrm>
+          <a:prstGeom prst="rect">
+            <a:avLst/>
+          </a:prstGeom>
+        </p:spPr>
+      </p:pic>
     </p:spTree>
   </p:cSld>
   <p:clrMapOvr>
@@ -7756,7 +7741,7 @@
                 <a:ea typeface="Arial" pitchFamily="34" charset="-122"/>
                 <a:cs typeface="Arial" pitchFamily="34" charset="-120"/>
               </a:rPr>
-              <a:t>Wij bouwen de bellijst op jullie ideale klant: branche, grootte, regio en functie. Bestaande relaties en uitsluitingen gaan er vooraf uit.</a:t>
+              <a:t>Wij bouwen de bellijst op jullie ideale klant: communicatieteams, zorginstellingen en gemeenten die beeld publiceren en toestemming aantoonbaar moeten vastleggen.</a:t>
             </a:r>
             <a:endParaRPr lang="en-US" sz="875" dirty="0"/>
           </a:p>
@@ -8390,7 +8375,7 @@
                 <a:ea typeface="Arial" pitchFamily="34" charset="-122"/>
                 <a:cs typeface="Arial" pitchFamily="34" charset="-120"/>
               </a:rPr>
-              <a:t>Bellijst op jullie ideale klant</a:t>
+              <a:t>Bellijst met communicatie, zorg en overheid</a:t>
             </a:r>
             <a:endParaRPr lang="en-US" sz="900" dirty="0"/>
           </a:p>

--- a/output/LINK. kennismaking Portrelo.pptx
+++ b/output/LINK. kennismaking Portrelo.pptx
@@ -5708,7 +5708,7 @@
                 <a:ea typeface="Arial" pitchFamily="34" charset="-122"/>
                 <a:cs typeface="Arial" pitchFamily="34" charset="-120"/>
               </a:rPr>
-              <a:t>Vanaf de eerste maandag na de kick-off bellen we dagelijks. Elke afspraak krijgt een bevestigingsmail naar de prospect en een overdracht met context naar jullie.</a:t>
+              <a:t>Vanaf de eerste maandag na de kick-off gaan we bellen, op de dagen en dagdelen die in onze data het beste werken voor jullie branche. Elke afspraak krijgt een bevestigingsmail naar de prospect en een overdracht met context naar jullie.</a:t>
             </a:r>
             <a:endParaRPr lang="en-US" sz="900" dirty="0"/>
           </a:p>
@@ -7913,7 +7913,7 @@
                 <a:ea typeface="Arial" pitchFamily="34" charset="-122"/>
                 <a:cs typeface="Arial" pitchFamily="34" charset="-120"/>
               </a:rPr>
-              <a:t>Elke werkdag bellen met een regionaal nummer op jullie naam. Elke week een rapportage, om de week evaluatie. Gaat het makkelijker of juist moeizamer, dan zitten we eerder om tafel en schakelen we direct.</a:t>
+              <a:t>We bellen op de dagen en dagdelen die in onze data het beste werken voor jullie branche, met een regionaal nummer op jullie naam. Elke week een rapportage, om de week evaluatie. Gaat het makkelijker of juist moeizamer, dan zitten we eerder om tafel en schakelen we direct.</a:t>
             </a:r>
             <a:endParaRPr lang="en-US" sz="875" dirty="0"/>
           </a:p>
@@ -8501,7 +8501,7 @@
                 <a:ea typeface="Arial" pitchFamily="34" charset="-122"/>
                 <a:cs typeface="Arial" pitchFamily="34" charset="-120"/>
               </a:rPr>
-              <a:t>Twaalf weken elke werkdag bellen</a:t>
+              <a:t>Twaalf weken bellen op de beste momenten</a:t>
             </a:r>
             <a:endParaRPr lang="en-US" sz="900" dirty="0"/>
           </a:p>

--- a/output/LINK. kennismaking Portrelo.pptx
+++ b/output/LINK. kennismaking Portrelo.pptx
@@ -7871,7 +7871,7 @@
                 <a:ea typeface="Arial" pitchFamily="34" charset="-122"/>
                 <a:cs typeface="Arial" pitchFamily="34" charset="-120"/>
               </a:rPr>
-              <a:t>Twaalf weken bellen</a:t>
+              <a:t>Looptijd van twaalf weken</a:t>
             </a:r>
             <a:endParaRPr lang="en-US" sz="1150" dirty="0"/>
           </a:p>
@@ -7913,7 +7913,7 @@
                 <a:ea typeface="Arial" pitchFamily="34" charset="-122"/>
                 <a:cs typeface="Arial" pitchFamily="34" charset="-120"/>
               </a:rPr>
-              <a:t>We bellen op de dagen en dagdelen die in onze data het beste werken voor jullie branche, met een regionaal nummer op jullie naam. Elke week een rapportage, om de week evaluatie. Gaat het makkelijker of juist moeizamer, dan zitten we eerder om tafel en schakelen we direct.</a:t>
+              <a:t>De pilot loopt twaalf weken. We bellen daarin op de dagen en dagdelen die in onze data het beste werken voor jullie branche, met een regionaal nummer op jullie naam. Elke week een rapportage, om de week evaluatie.</a:t>
             </a:r>
             <a:endParaRPr lang="en-US" sz="875" dirty="0"/>
           </a:p>
@@ -8501,7 +8501,7 @@
                 <a:ea typeface="Arial" pitchFamily="34" charset="-122"/>
                 <a:cs typeface="Arial" pitchFamily="34" charset="-120"/>
               </a:rPr>
-              <a:t>Twaalf weken bellen op de beste momenten</a:t>
+              <a:t>Beldagen binnen een looptijd van 12 weken</a:t>
             </a:r>
             <a:endParaRPr lang="en-US" sz="900" dirty="0"/>
           </a:p>

--- a/output/LINK. kennismaking Portrelo.pptx
+++ b/output/LINK. kennismaking Portrelo.pptx
@@ -4068,7 +4068,7 @@
                 <a:ea typeface="Arial" pitchFamily="34" charset="-122"/>
                 <a:cs typeface="Arial" pitchFamily="34" charset="-120"/>
               </a:rPr>
-              <a:t>Eén persoon die jullie campagne kent, van script tot rapportage.</a:t>
+              <a:t>Eén persoon die jullie campagne kent, van kick-off tot rapportage.</a:t>
             </a:r>
             <a:endParaRPr lang="en-US" sz="950" dirty="0"/>
           </a:p>
@@ -5541,7 +5541,7 @@
                 <a:ea typeface="Arial" pitchFamily="34" charset="-122"/>
                 <a:cs typeface="Arial" pitchFamily="34" charset="-120"/>
               </a:rPr>
-              <a:t>Samen scherp: doelgroep, beslisser, propositie, bezwaren en wat een goede afspraak voor jullie is. Wij schrijven het belscript, jullie keuren goed.</a:t>
+              <a:t>Samen scherp: doelgroep, beslisser, propositie, bezwaren en wat een goede afspraak voor jullie is. Wij leggen de USP's en de opbouw van het gesprek vast, jullie keuren goed.</a:t>
             </a:r>
             <a:endParaRPr lang="en-US" sz="900" dirty="0"/>
           </a:p>
@@ -7527,7 +7527,7 @@
                 <a:ea typeface="Arial" pitchFamily="34" charset="-122"/>
                 <a:cs typeface="Arial" pitchFamily="34" charset="-120"/>
               </a:rPr>
-              <a:t>Kick-off en belscript</a:t>
+              <a:t>Kick-off en USP's</a:t>
             </a:r>
             <a:endParaRPr lang="en-US" sz="1150" dirty="0"/>
           </a:p>
@@ -7569,7 +7569,7 @@
                 <a:ea typeface="Arial" pitchFamily="34" charset="-122"/>
                 <a:cs typeface="Arial" pitchFamily="34" charset="-120"/>
               </a:rPr>
-              <a:t>Samen scherp wat we gaan vertellen en bij wie. Wij schrijven het belscript, jullie keuren het goed.</a:t>
+              <a:t>Samen scherp wat we gaan vertellen en bij wie. Wij leggen de USP's vast, jullie keuren ze goed.</a:t>
             </a:r>
             <a:endParaRPr lang="en-US" sz="875" dirty="0"/>
           </a:p>
@@ -8288,7 +8288,7 @@
         <p:spPr>
           <a:xfrm>
             <a:off x="3733791" y="5245087"/>
-            <a:ext cx="3555991" cy="215899"/>
+            <a:ext cx="3746491" cy="215899"/>
           </a:xfrm>
           <a:prstGeom prst="rect">
             <a:avLst/>
@@ -8312,7 +8312,7 @@
                 <a:ea typeface="Arial" pitchFamily="34" charset="-122"/>
                 <a:cs typeface="Arial" pitchFamily="34" charset="-120"/>
               </a:rPr>
-              <a:t>Kick-off en belscript</a:t>
+              <a:t>Kick-off en USP's</a:t>
             </a:r>
             <a:endParaRPr lang="en-US" sz="900" dirty="0"/>
           </a:p>
@@ -8334,7 +8334,7 @@
         </p:blipFill>
         <p:spPr>
           <a:xfrm>
-            <a:off x="7340582" y="5276837"/>
+            <a:off x="7556481" y="5276837"/>
             <a:ext cx="127000" cy="127000"/>
           </a:xfrm>
           <a:prstGeom prst="rect">
@@ -8350,8 +8350,8 @@
         </p:nvSpPr>
         <p:spPr>
           <a:xfrm>
-            <a:off x="7543781" y="5245087"/>
-            <a:ext cx="3555991" cy="215899"/>
+            <a:off x="7759681" y="5245087"/>
+            <a:ext cx="3746491" cy="215899"/>
           </a:xfrm>
           <a:prstGeom prst="rect">
             <a:avLst/>
@@ -8414,7 +8414,7 @@
         <p:spPr>
           <a:xfrm>
             <a:off x="3733791" y="5499086"/>
-            <a:ext cx="3555991" cy="215899"/>
+            <a:ext cx="3746491" cy="215899"/>
           </a:xfrm>
           <a:prstGeom prst="rect">
             <a:avLst/>
@@ -8460,7 +8460,7 @@
         </p:blipFill>
         <p:spPr>
           <a:xfrm>
-            <a:off x="7340582" y="5530836"/>
+            <a:off x="7556481" y="5530836"/>
             <a:ext cx="127000" cy="127000"/>
           </a:xfrm>
           <a:prstGeom prst="rect">
@@ -8476,8 +8476,8 @@
         </p:nvSpPr>
         <p:spPr>
           <a:xfrm>
-            <a:off x="7543781" y="5499086"/>
-            <a:ext cx="3555991" cy="215899"/>
+            <a:off x="7759681" y="5499086"/>
+            <a:ext cx="3746491" cy="215899"/>
           </a:xfrm>
           <a:prstGeom prst="rect">
             <a:avLst/>
@@ -8540,7 +8540,7 @@
         <p:spPr>
           <a:xfrm>
             <a:off x="3733791" y="5753086"/>
-            <a:ext cx="3555991" cy="215899"/>
+            <a:ext cx="3746491" cy="215899"/>
           </a:xfrm>
           <a:prstGeom prst="rect">
             <a:avLst/>
@@ -8586,7 +8586,7 @@
         </p:blipFill>
         <p:spPr>
           <a:xfrm>
-            <a:off x="7340582" y="5784836"/>
+            <a:off x="7556481" y="5784836"/>
             <a:ext cx="127000" cy="127000"/>
           </a:xfrm>
           <a:prstGeom prst="rect">
@@ -8602,8 +8602,8 @@
         </p:nvSpPr>
         <p:spPr>
           <a:xfrm>
-            <a:off x="7543781" y="5753086"/>
-            <a:ext cx="3555991" cy="215899"/>
+            <a:off x="7759681" y="5753086"/>
+            <a:ext cx="3746491" cy="215899"/>
           </a:xfrm>
           <a:prstGeom prst="rect">
             <a:avLst/>
@@ -10335,7 +10335,7 @@
                 <a:ea typeface="Arial" pitchFamily="34" charset="-122"/>
                 <a:cs typeface="Arial" pitchFamily="34" charset="-120"/>
               </a:rPr>
-              <a:t>Goedkeuring belscript</a:t>
+              <a:t>Goedkeuring op de USP's</a:t>
             </a:r>
             <a:endParaRPr lang="en-US" sz="1450" dirty="0"/>
           </a:p>
